--- a/apoio/fundamentos/slides_fundamentos.pptx
+++ b/apoio/fundamentos/slides_fundamentos.pptx
@@ -23,7 +23,11 @@
     <p:sldId id="267" r:id="rId18"/>
     <p:sldId id="268" r:id="rId19"/>
     <p:sldId id="269" r:id="rId20"/>
+    <p:sldId id="279" r:id="rIdG24"/>
     <p:sldId id="270" r:id="rId21"/>
+    <p:sldId id="280" r:id="rIdG25"/>
+    <p:sldId id="281" r:id="rIdG26"/>
+    <p:sldId id="282" r:id="rIdG27"/>
     <p:sldId id="271" r:id="rId22"/>
     <p:sldId id="272" r:id="rId23"/>
     <p:sldId id="273" r:id="rId24"/>
@@ -11867,6 +11871,2069 @@
                 <a:latin typeface="Calibri"/>
               </a:rPr>
               <a:t>Outro teste (CNN, ago. 2023): o mesmo tutor rejeitou uma divisão correta e elogiou uma multiplicação errada. Fonte do caso: The New York Times, jun. 2023 (tradução do R7, 09/07/2023).</a:t>
+            </a:r>
+          </a:p>
+        </p:txBody>
+      </p:sp>
+    </p:spTree>
+  </p:cSld>
+  <p:clrMapOvr>
+    <a:masterClrMapping/>
+  </p:clrMapOvr>
+</p:sld>
+</file>
+
+<file path=ppt/slides/slide24.xml><?xml version="1.0" encoding="utf-8"?>
+<p:sld xmlns:a="http://schemas.openxmlformats.org/drawingml/2006/main" xmlns:p="http://schemas.openxmlformats.org/presentationml/2006/main" xmlns:r="http://schemas.openxmlformats.org/officeDocument/2006/relationships">
+  <p:cSld>
+    <p:spTree>
+      <p:nvGrpSpPr>
+        <p:cNvPr id="1" name=""/>
+        <p:cNvGrpSpPr/>
+        <p:nvPr/>
+      </p:nvGrpSpPr>
+      <p:grpSpPr/>
+      <p:pic>
+        <p:nvPicPr>
+          <p:cNvPr id="2" name="Picture 1" descr="image3.png"/>
+          <p:cNvPicPr>
+            <a:picLocks noChangeAspect="1"/>
+          </p:cNvPicPr>
+          <p:nvPr/>
+        </p:nvPicPr>
+        <p:blipFill>
+          <a:blip r:embed="rId2"/>
+          <a:stretch>
+            <a:fillRect/>
+          </a:stretch>
+        </p:blipFill>
+        <p:spPr>
+          <a:xfrm>
+            <a:off x="0" y="0"/>
+            <a:ext cx="12192000" cy="6858000"/>
+          </a:xfrm>
+          <a:prstGeom prst="rect">
+            <a:avLst/>
+          </a:prstGeom>
+        </p:spPr>
+      </p:pic>
+      <p:sp>
+        <p:nvSpPr>
+          <p:cNvPr id="3" name="TextBox 2"/>
+          <p:cNvSpPr txBox="1"/>
+          <p:nvPr/>
+        </p:nvSpPr>
+        <p:spPr>
+          <a:xfrm>
+            <a:off x="777240" y="411480"/>
+            <a:ext cx="9692640" cy="731520"/>
+          </a:xfrm>
+          <a:prstGeom prst="rect">
+            <a:avLst/>
+          </a:prstGeom>
+          <a:noFill/>
+        </p:spPr>
+        <p:txBody>
+          <a:bodyPr wrap="square" anchor="t" lIns="45720" rIns="45720">
+            <a:spAutoFit/>
+          </a:bodyPr>
+          <a:lstStyle/>
+          <a:p>
+            <a:pPr algn="l">
+              <a:spcAft>
+                <a:spcPts val="600"/>
+              </a:spcAft>
+            </a:pPr>
+            <a:r>
+              <a:rPr sz="3600" b="1">
+                <a:solidFill>
+                  <a:srgbClr val="7ED957"/>
+                </a:solidFill>
+                <a:latin typeface="Calibri"/>
+              </a:rPr>
+              <a:t>Um bom prompt </a:t>
+            </a:r>
+            <a:r>
+              <a:rPr sz="3600" b="1">
+                <a:solidFill>
+                  <a:srgbClr val="FFFFFF"/>
+                </a:solidFill>
+                <a:latin typeface="Calibri"/>
+              </a:rPr>
+              <a:t>diz o que você quer obter</a:t>
+            </a:r>
+          </a:p>
+        </p:txBody>
+      </p:sp>
+      <p:sp>
+        <p:nvSpPr>
+          <p:cNvPr id="4" name="TextBox 3"/>
+          <p:cNvSpPr txBox="1"/>
+          <p:nvPr/>
+        </p:nvSpPr>
+        <p:spPr>
+          <a:xfrm>
+            <a:off x="777240" y="1097280"/>
+            <a:ext cx="9875520" cy="457200"/>
+          </a:xfrm>
+          <a:prstGeom prst="rect">
+            <a:avLst/>
+          </a:prstGeom>
+          <a:noFill/>
+        </p:spPr>
+        <p:txBody>
+          <a:bodyPr wrap="square" anchor="t" lIns="45720" rIns="45720">
+            <a:spAutoFit/>
+          </a:bodyPr>
+          <a:lstStyle/>
+          <a:p>
+            <a:pPr algn="l">
+              <a:spcAft>
+                <a:spcPts val="600"/>
+              </a:spcAft>
+            </a:pPr>
+            <a:r>
+              <a:rPr sz="2000" b="0">
+                <a:solidFill>
+                  <a:srgbClr val="7ED957"/>
+                </a:solidFill>
+                <a:latin typeface="Calibri"/>
+              </a:rPr>
+              <a:t>Os seis campos, mais dois cuidados</a:t>
+            </a:r>
+          </a:p>
+        </p:txBody>
+      </p:sp>
+      <p:sp>
+        <p:nvSpPr>
+          <p:cNvPr id="5" name="Rectangle 4"/>
+          <p:cNvSpPr/>
+          <p:nvPr/>
+        </p:nvSpPr>
+        <p:spPr>
+          <a:xfrm>
+            <a:off x="777240" y="1572768"/>
+            <a:ext cx="4206240" cy="25603"/>
+          </a:xfrm>
+          <a:prstGeom prst="rect">
+            <a:avLst/>
+          </a:prstGeom>
+          <a:solidFill>
+            <a:srgbClr val="7ED957"/>
+          </a:solidFill>
+          <a:ln>
+            <a:noFill/>
+          </a:ln>
+        </p:spPr>
+        <p:style>
+          <a:lnRef idx="1">
+            <a:schemeClr val="accent1"/>
+          </a:lnRef>
+          <a:fillRef idx="3">
+            <a:schemeClr val="accent1"/>
+          </a:fillRef>
+          <a:effectRef idx="2">
+            <a:schemeClr val="accent1"/>
+          </a:effectRef>
+          <a:fontRef idx="minor">
+            <a:schemeClr val="lt1"/>
+          </a:fontRef>
+        </p:style>
+        <p:txBody>
+          <a:bodyPr rtlCol="0" anchor="ctr"/>
+          <a:lstStyle/>
+          <a:p>
+            <a:pPr algn="ctr"/>
+          </a:p>
+        </p:txBody>
+      </p:sp>
+      <p:sp>
+        <p:nvSpPr>
+          <p:cNvPr id="6" name="Oval 5"/>
+          <p:cNvSpPr/>
+          <p:nvPr/>
+        </p:nvSpPr>
+        <p:spPr>
+          <a:xfrm>
+            <a:off x="4946903" y="1531620"/>
+            <a:ext cx="128016" cy="128016"/>
+          </a:xfrm>
+          <a:prstGeom prst="ellipse">
+            <a:avLst/>
+          </a:prstGeom>
+          <a:solidFill>
+            <a:srgbClr val="7ED957"/>
+          </a:solidFill>
+          <a:ln>
+            <a:noFill/>
+          </a:ln>
+        </p:spPr>
+        <p:style>
+          <a:lnRef idx="1">
+            <a:schemeClr val="accent1"/>
+          </a:lnRef>
+          <a:fillRef idx="3">
+            <a:schemeClr val="accent1"/>
+          </a:fillRef>
+          <a:effectRef idx="2">
+            <a:schemeClr val="accent1"/>
+          </a:effectRef>
+          <a:fontRef idx="minor">
+            <a:schemeClr val="lt1"/>
+          </a:fontRef>
+        </p:style>
+        <p:txBody>
+          <a:bodyPr rtlCol="0" anchor="ctr"/>
+          <a:lstStyle/>
+          <a:p>
+            <a:pPr algn="ctr"/>
+          </a:p>
+        </p:txBody>
+      </p:sp>
+      <p:sp>
+        <p:nvSpPr>
+          <p:cNvPr id="7" name="Caixa 7"/>
+          <p:cNvSpPr txBox="1"/>
+          <p:nvPr/>
+        </p:nvSpPr>
+        <p:spPr>
+          <a:xfrm>
+            <a:off x="777240" y="1737360"/>
+            <a:ext cx="5300000" cy="3900000"/>
+          </a:xfrm>
+          <a:prstGeom prst="rect">
+            <a:avLst/>
+          </a:prstGeom>
+          <a:noFill/>
+        </p:spPr>
+        <p:txBody>
+          <a:bodyPr wrap="square" anchor="t" lIns="45720" rIns="45720">
+            <a:normAutofit/>
+          </a:bodyPr>
+          <a:lstStyle/>
+          <a:p>
+            <a:pPr algn="l">
+              <a:spcAft>
+                <a:spcPts val="700"/>
+              </a:spcAft>
+              <a:buNone/>
+            </a:pPr>
+            <a:r>
+              <a:rPr lang="pt-BR" sz="2000" b="1">
+                <a:solidFill>
+                  <a:srgbClr val="7ED957"/>
+                </a:solidFill>
+                <a:latin typeface="Calibri"/>
+              </a:rPr>
+              <a:t>Antes dos seis campos</a:t>
+            </a:r>
+          </a:p>
+          <a:p>
+            <a:pPr algn="l" marL="285750" indent="-285750">
+              <a:spcAft>
+                <a:spcPts val="700"/>
+              </a:spcAft>
+              <a:buFont typeface="Arial"/>
+              <a:buChar char="•"/>
+            </a:pPr>
+            <a:r>
+              <a:rPr lang="pt-BR" sz="1700" b="1">
+                <a:solidFill>
+                  <a:srgbClr val="FFFFFF"/>
+                </a:solidFill>
+                <a:latin typeface="Calibri"/>
+              </a:rPr>
+              <a:t>Diga o que quer obter e para quê: </a:t>
+            </a:r>
+            <a:r>
+              <a:rPr lang="pt-BR" sz="1700" b="0">
+                <a:solidFill>
+                  <a:srgbClr val="FFFFFF"/>
+                </a:solidFill>
+                <a:latin typeface="Calibri"/>
+              </a:rPr>
+              <a:t>“um convite às famílias para a palestra de 26/11”.</a:t>
+            </a:r>
+          </a:p>
+          <a:p>
+            <a:pPr algn="l" marL="285750" indent="-285750">
+              <a:spcAft>
+                <a:spcPts val="700"/>
+              </a:spcAft>
+              <a:buFont typeface="Arial"/>
+              <a:buChar char="•"/>
+            </a:pPr>
+            <a:r>
+              <a:rPr lang="pt-BR" sz="1700" b="1">
+                <a:solidFill>
+                  <a:srgbClr val="FFFFFF"/>
+                </a:solidFill>
+                <a:latin typeface="Calibri"/>
+              </a:rPr>
+              <a:t>Diga o que anexou, pelo nome: </a:t>
+            </a:r>
+            <a:r>
+              <a:rPr lang="pt-BR" sz="1700" b="0">
+                <a:solidFill>
+                  <a:srgbClr val="FFFFFF"/>
+                </a:solidFill>
+                <a:latin typeface="Calibri"/>
+              </a:rPr>
+              <a:t>“use só o tom de voz e as normas anexados”.</a:t>
+            </a:r>
+          </a:p>
+          <a:p>
+            <a:pPr algn="l" marL="285750" indent="-285750">
+              <a:spcAft>
+                <a:spcPts val="700"/>
+              </a:spcAft>
+              <a:buFont typeface="Arial"/>
+              <a:buChar char="•"/>
+            </a:pPr>
+            <a:r>
+              <a:rPr lang="pt-BR" sz="1700" b="1">
+                <a:solidFill>
+                  <a:srgbClr val="FFFFFF"/>
+                </a:solidFill>
+                <a:latin typeface="Calibri"/>
+              </a:rPr>
+              <a:t>Peça o formato: </a:t>
+            </a:r>
+            <a:r>
+              <a:rPr lang="pt-BR" sz="1700" b="0">
+                <a:solidFill>
+                  <a:srgbClr val="FFFFFF"/>
+                </a:solidFill>
+                <a:latin typeface="Calibri"/>
+              </a:rPr>
+              <a:t>tabela, tópicos, até 600 caracteres.</a:t>
+            </a:r>
+          </a:p>
+          <a:p>
+            <a:pPr algn="l" marL="285750" indent="-285750">
+              <a:spcAft>
+                <a:spcPts val="700"/>
+              </a:spcAft>
+              <a:buFont typeface="Arial"/>
+              <a:buChar char="•"/>
+            </a:pPr>
+            <a:r>
+              <a:rPr lang="pt-BR" sz="1700" b="1">
+                <a:solidFill>
+                  <a:srgbClr val="FFFFFF"/>
+                </a:solidFill>
+                <a:latin typeface="Calibri"/>
+              </a:rPr>
+              <a:t>Ajuste uma coisa por vez </a:t>
+            </a:r>
+            <a:r>
+              <a:rPr lang="pt-BR" sz="1700" b="0">
+                <a:solidFill>
+                  <a:srgbClr val="FFFFFF"/>
+                </a:solidFill>
+                <a:latin typeface="Calibri"/>
+              </a:rPr>
+              <a:t>e diga o que manter.</a:t>
+            </a:r>
+          </a:p>
+        </p:txBody>
+      </p:sp>
+      <p:sp>
+        <p:nvSpPr>
+          <p:cNvPr id="8" name="Caixa 8"/>
+          <p:cNvSpPr txBox="1"/>
+          <p:nvPr/>
+        </p:nvSpPr>
+        <p:spPr>
+          <a:xfrm>
+            <a:off x="6400800" y="1737360"/>
+            <a:ext cx="4937760" cy="3200400"/>
+          </a:xfrm>
+          <a:prstGeom prst="roundRect">
+            <a:avLst/>
+          </a:prstGeom>
+          <a:solidFill>
+            <a:srgbClr val="0F2E45"/>
+          </a:solidFill>
+          <a:ln w="15875">
+            <a:solidFill>
+              <a:srgbClr val="29ABE2"/>
+            </a:solidFill>
+          </a:ln>
+        </p:spPr>
+        <p:txBody>
+          <a:bodyPr wrap="square" anchor="t" lIns="137160" rIns="137160" tIns="109728" bIns="91440">
+            <a:normAutofit/>
+          </a:bodyPr>
+          <a:lstStyle/>
+          <a:p>
+            <a:pPr algn="l">
+              <a:spcAft>
+                <a:spcPts val="900"/>
+              </a:spcAft>
+              <a:buNone/>
+            </a:pPr>
+            <a:r>
+              <a:rPr lang="pt-BR" sz="1400" b="1">
+                <a:solidFill>
+                  <a:srgbClr val="29ABE2"/>
+                </a:solidFill>
+                <a:latin typeface="Calibri"/>
+              </a:rPr>
+              <a:t>A FRASE QUE EVITA INVENÇÃO</a:t>
+            </a:r>
+          </a:p>
+          <a:p>
+            <a:pPr algn="l">
+              <a:spcAft>
+                <a:spcPts val="900"/>
+              </a:spcAft>
+              <a:buNone/>
+            </a:pPr>
+            <a:r>
+              <a:rPr lang="pt-BR" sz="2200" b="1">
+                <a:solidFill>
+                  <a:srgbClr val="FFFFFF"/>
+                </a:solidFill>
+                <a:latin typeface="Calibri"/>
+              </a:rPr>
+              <a:t>“Se faltar alguma informação importante, não invente: pergunte antes de continuar.”</a:t>
+            </a:r>
+          </a:p>
+          <a:p>
+            <a:pPr algn="l">
+              <a:spcAft>
+                <a:spcPts val="700"/>
+              </a:spcAft>
+              <a:buNone/>
+            </a:pPr>
+            <a:r>
+              <a:rPr lang="pt-BR" sz="1500" b="0">
+                <a:solidFill>
+                  <a:srgbClr val="C9D6E0"/>
+                </a:solidFill>
+                <a:latin typeface="Calibri"/>
+              </a:rPr>
+              <a:t>A IA completa lacunas com o que é provável, não com o que é verdade. Esta linha está nos prompts de todos os roteiros.</a:t>
+            </a:r>
+          </a:p>
+        </p:txBody>
+      </p:sp>
+      <p:sp>
+        <p:nvSpPr>
+          <p:cNvPr id="9" name="Caixa 9"/>
+          <p:cNvSpPr txBox="1"/>
+          <p:nvPr/>
+        </p:nvSpPr>
+        <p:spPr>
+          <a:xfrm>
+            <a:off x="1920240" y="5943600"/>
+            <a:ext cx="9509760" cy="420000"/>
+          </a:xfrm>
+          <a:prstGeom prst="rect">
+            <a:avLst/>
+          </a:prstGeom>
+          <a:noFill/>
+        </p:spPr>
+        <p:txBody>
+          <a:bodyPr wrap="square" anchor="t" lIns="45720" rIns="45720">
+            <a:normAutofit/>
+          </a:bodyPr>
+          <a:lstStyle/>
+          <a:p>
+            <a:pPr algn="l">
+              <a:spcAft>
+                <a:spcPts val="700"/>
+              </a:spcAft>
+              <a:buNone/>
+            </a:pPr>
+            <a:r>
+              <a:rPr lang="pt-BR" sz="1500" b="0">
+                <a:solidFill>
+                  <a:srgbClr val="C9D6E0"/>
+                </a:solidFill>
+                <a:latin typeface="Calibri"/>
+              </a:rPr>
+              <a:t>Orientações completas: </a:t>
+            </a:r>
+            <a:r>
+              <a:rPr lang="pt-BR" sz="1500" b="1">
+                <a:solidFill>
+                  <a:srgbClr val="29ABE2"/>
+                </a:solidFill>
+                <a:latin typeface="Calibri"/>
+                <a:hlinkClick r:id="rIdGuia"/>
+              </a:rPr>
+              <a:t>Guia de introdução: a tela de uma IA</a:t>
+            </a:r>
+            <a:r>
+              <a:rPr lang="pt-BR" sz="1500" b="0">
+                <a:solidFill>
+                  <a:srgbClr val="C9D6E0"/>
+                </a:solidFill>
+                <a:latin typeface="Calibri"/>
+              </a:rPr>
+              <a:t> (apoio/fundamentos)</a:t>
+            </a:r>
+          </a:p>
+        </p:txBody>
+      </p:sp>
+    </p:spTree>
+  </p:cSld>
+  <p:clrMapOvr>
+    <a:masterClrMapping/>
+  </p:clrMapOvr>
+</p:sld>
+</file>
+
+<file path=ppt/slides/slide25.xml><?xml version="1.0" encoding="utf-8"?>
+<p:sld xmlns:a="http://schemas.openxmlformats.org/drawingml/2006/main" xmlns:p="http://schemas.openxmlformats.org/presentationml/2006/main" xmlns:r="http://schemas.openxmlformats.org/officeDocument/2006/relationships">
+  <p:cSld>
+    <p:spTree>
+      <p:nvGrpSpPr>
+        <p:cNvPr id="1" name=""/>
+        <p:cNvGrpSpPr/>
+        <p:nvPr/>
+      </p:nvGrpSpPr>
+      <p:grpSpPr/>
+      <p:pic>
+        <p:nvPicPr>
+          <p:cNvPr id="2" name="Picture 1" descr="image3.png"/>
+          <p:cNvPicPr>
+            <a:picLocks noChangeAspect="1"/>
+          </p:cNvPicPr>
+          <p:nvPr/>
+        </p:nvPicPr>
+        <p:blipFill>
+          <a:blip r:embed="rId2"/>
+          <a:stretch>
+            <a:fillRect/>
+          </a:stretch>
+        </p:blipFill>
+        <p:spPr>
+          <a:xfrm>
+            <a:off x="0" y="0"/>
+            <a:ext cx="12192000" cy="6858000"/>
+          </a:xfrm>
+          <a:prstGeom prst="rect">
+            <a:avLst/>
+          </a:prstGeom>
+        </p:spPr>
+      </p:pic>
+      <p:sp>
+        <p:nvSpPr>
+          <p:cNvPr id="3" name="TextBox 2"/>
+          <p:cNvSpPr txBox="1"/>
+          <p:nvPr/>
+        </p:nvSpPr>
+        <p:spPr>
+          <a:xfrm>
+            <a:off x="777240" y="411480"/>
+            <a:ext cx="9692640" cy="731520"/>
+          </a:xfrm>
+          <a:prstGeom prst="rect">
+            <a:avLst/>
+          </a:prstGeom>
+          <a:noFill/>
+        </p:spPr>
+        <p:txBody>
+          <a:bodyPr wrap="square" anchor="t" lIns="45720" rIns="45720">
+            <a:spAutoFit/>
+          </a:bodyPr>
+          <a:lstStyle/>
+          <a:p>
+            <a:pPr algn="l">
+              <a:spcAft>
+                <a:spcPts val="600"/>
+              </a:spcAft>
+            </a:pPr>
+            <a:r>
+              <a:rPr sz="3600" b="1">
+                <a:solidFill>
+                  <a:srgbClr val="7ED957"/>
+                </a:solidFill>
+                <a:latin typeface="Calibri"/>
+              </a:rPr>
+              <a:t>A tela </a:t>
+            </a:r>
+            <a:r>
+              <a:rPr sz="3600" b="1">
+                <a:solidFill>
+                  <a:srgbClr val="FFFFFF"/>
+                </a:solidFill>
+                <a:latin typeface="Calibri"/>
+              </a:rPr>
+              <a:t>de uma IA</a:t>
+            </a:r>
+          </a:p>
+        </p:txBody>
+      </p:sp>
+      <p:sp>
+        <p:nvSpPr>
+          <p:cNvPr id="4" name="TextBox 3"/>
+          <p:cNvSpPr txBox="1"/>
+          <p:nvPr/>
+        </p:nvSpPr>
+        <p:spPr>
+          <a:xfrm>
+            <a:off x="777240" y="1097280"/>
+            <a:ext cx="9875520" cy="457200"/>
+          </a:xfrm>
+          <a:prstGeom prst="rect">
+            <a:avLst/>
+          </a:prstGeom>
+          <a:noFill/>
+        </p:spPr>
+        <p:txBody>
+          <a:bodyPr wrap="square" anchor="t" lIns="45720" rIns="45720">
+            <a:spAutoFit/>
+          </a:bodyPr>
+          <a:lstStyle/>
+          <a:p>
+            <a:pPr algn="l">
+              <a:spcAft>
+                <a:spcPts val="600"/>
+              </a:spcAft>
+            </a:pPr>
+            <a:r>
+              <a:rPr sz="2000" b="0">
+                <a:solidFill>
+                  <a:srgbClr val="7ED957"/>
+                </a:solidFill>
+                <a:latin typeface="Calibri"/>
+              </a:rPr>
+              <a:t>O que é cada parte, em qualquer plataforma</a:t>
+            </a:r>
+          </a:p>
+        </p:txBody>
+      </p:sp>
+      <p:sp>
+        <p:nvSpPr>
+          <p:cNvPr id="5" name="Rectangle 4"/>
+          <p:cNvSpPr/>
+          <p:nvPr/>
+        </p:nvSpPr>
+        <p:spPr>
+          <a:xfrm>
+            <a:off x="777240" y="1572768"/>
+            <a:ext cx="4206240" cy="25603"/>
+          </a:xfrm>
+          <a:prstGeom prst="rect">
+            <a:avLst/>
+          </a:prstGeom>
+          <a:solidFill>
+            <a:srgbClr val="7ED957"/>
+          </a:solidFill>
+          <a:ln>
+            <a:noFill/>
+          </a:ln>
+        </p:spPr>
+        <p:style>
+          <a:lnRef idx="1">
+            <a:schemeClr val="accent1"/>
+          </a:lnRef>
+          <a:fillRef idx="3">
+            <a:schemeClr val="accent1"/>
+          </a:fillRef>
+          <a:effectRef idx="2">
+            <a:schemeClr val="accent1"/>
+          </a:effectRef>
+          <a:fontRef idx="minor">
+            <a:schemeClr val="lt1"/>
+          </a:fontRef>
+        </p:style>
+        <p:txBody>
+          <a:bodyPr rtlCol="0" anchor="ctr"/>
+          <a:lstStyle/>
+          <a:p>
+            <a:pPr algn="ctr"/>
+          </a:p>
+        </p:txBody>
+      </p:sp>
+      <p:sp>
+        <p:nvSpPr>
+          <p:cNvPr id="6" name="Oval 5"/>
+          <p:cNvSpPr/>
+          <p:nvPr/>
+        </p:nvSpPr>
+        <p:spPr>
+          <a:xfrm>
+            <a:off x="4946903" y="1531620"/>
+            <a:ext cx="128016" cy="128016"/>
+          </a:xfrm>
+          <a:prstGeom prst="ellipse">
+            <a:avLst/>
+          </a:prstGeom>
+          <a:solidFill>
+            <a:srgbClr val="7ED957"/>
+          </a:solidFill>
+          <a:ln>
+            <a:noFill/>
+          </a:ln>
+        </p:spPr>
+        <p:style>
+          <a:lnRef idx="1">
+            <a:schemeClr val="accent1"/>
+          </a:lnRef>
+          <a:fillRef idx="3">
+            <a:schemeClr val="accent1"/>
+          </a:fillRef>
+          <a:effectRef idx="2">
+            <a:schemeClr val="accent1"/>
+          </a:effectRef>
+          <a:fontRef idx="minor">
+            <a:schemeClr val="lt1"/>
+          </a:fontRef>
+        </p:style>
+        <p:txBody>
+          <a:bodyPr rtlCol="0" anchor="ctr"/>
+          <a:lstStyle/>
+          <a:p>
+            <a:pPr algn="ctr"/>
+          </a:p>
+        </p:txBody>
+      </p:sp>
+      <p:pic>
+        <p:nvPicPr>
+          <p:cNvPr id="7" name="Infográfico: a tela de uma IA, com 11 partes numeradas" descr="Infográfico: a tela de uma IA, com 11 partes numeradas">
+            <a:hlinkClick r:id="rIdGuia"/>
+          </p:cNvPr>
+          <p:cNvPicPr>
+            <a:picLocks noChangeAspect="1"/>
+          </p:cNvPicPr>
+          <p:nvPr/>
+        </p:nvPicPr>
+        <p:blipFill>
+          <a:blip r:embed="rIdInfo"/>
+          <a:stretch>
+            <a:fillRect/>
+          </a:stretch>
+        </p:blipFill>
+        <p:spPr>
+          <a:xfrm>
+            <a:off x="777240" y="1737360"/>
+            <a:ext cx="6400800" cy="3840480"/>
+          </a:xfrm>
+          <a:prstGeom prst="rect">
+            <a:avLst/>
+          </a:prstGeom>
+        </p:spPr>
+      </p:pic>
+      <p:sp>
+        <p:nvSpPr>
+          <p:cNvPr id="8" name="Caixa 8"/>
+          <p:cNvSpPr txBox="1"/>
+          <p:nvPr/>
+        </p:nvSpPr>
+        <p:spPr>
+          <a:xfrm>
+            <a:off x="7406640" y="1737360"/>
+            <a:ext cx="3050000" cy="3840480"/>
+          </a:xfrm>
+          <a:prstGeom prst="rect">
+            <a:avLst/>
+          </a:prstGeom>
+          <a:noFill/>
+        </p:spPr>
+        <p:txBody>
+          <a:bodyPr wrap="square" anchor="t" lIns="45720" rIns="45720">
+            <a:normAutofit/>
+          </a:bodyPr>
+          <a:lstStyle/>
+          <a:p>
+            <a:pPr algn="l">
+              <a:spcAft>
+                <a:spcPts val="700"/>
+              </a:spcAft>
+              <a:buNone/>
+            </a:pPr>
+            <a:r>
+              <a:rPr lang="pt-BR" sz="1800" b="1">
+                <a:solidFill>
+                  <a:srgbClr val="7ED957"/>
+                </a:solidFill>
+                <a:latin typeface="Calibri"/>
+              </a:rPr>
+              <a:t>Para começar</a:t>
+            </a:r>
+          </a:p>
+          <a:p>
+            <a:pPr algn="l" marL="285750" indent="-285750">
+              <a:spcAft>
+                <a:spcPts val="700"/>
+              </a:spcAft>
+              <a:buFont typeface="Arial"/>
+              <a:buChar char="•"/>
+            </a:pPr>
+            <a:r>
+              <a:rPr lang="pt-BR" sz="1500" b="1">
+                <a:solidFill>
+                  <a:srgbClr val="FFFFFF"/>
+                </a:solidFill>
+                <a:latin typeface="Calibri"/>
+              </a:rPr>
+              <a:t>Projetos: </a:t>
+            </a:r>
+            <a:r>
+              <a:rPr lang="pt-BR" sz="1500" b="0">
+                <a:solidFill>
+                  <a:srgbClr val="FFFFFF"/>
+                </a:solidFill>
+                <a:latin typeface="Calibri"/>
+              </a:rPr>
+              <a:t>instruções e arquivos fixos.</a:t>
+            </a:r>
+          </a:p>
+          <a:p>
+            <a:pPr algn="l" marL="285750" indent="-285750">
+              <a:spcAft>
+                <a:spcPts val="700"/>
+              </a:spcAft>
+              <a:buFont typeface="Arial"/>
+              <a:buChar char="•"/>
+            </a:pPr>
+            <a:r>
+              <a:rPr lang="pt-BR" sz="1500" b="1">
+                <a:solidFill>
+                  <a:srgbClr val="FFFFFF"/>
+                </a:solidFill>
+                <a:latin typeface="Calibri"/>
+              </a:rPr>
+              <a:t>+ Adicionar: </a:t>
+            </a:r>
+            <a:r>
+              <a:rPr lang="pt-BR" sz="1500" b="0">
+                <a:solidFill>
+                  <a:srgbClr val="FFFFFF"/>
+                </a:solidFill>
+                <a:latin typeface="Calibri"/>
+              </a:rPr>
+              <a:t>arquivo, pasta ou projeto.</a:t>
+            </a:r>
+          </a:p>
+          <a:p>
+            <a:pPr algn="l" marL="285750" indent="-285750">
+              <a:spcAft>
+                <a:spcPts val="700"/>
+              </a:spcAft>
+              <a:buFont typeface="Arial"/>
+              <a:buChar char="•"/>
+            </a:pPr>
+            <a:r>
+              <a:rPr lang="pt-BR" sz="1500" b="1">
+                <a:solidFill>
+                  <a:srgbClr val="FFFFFF"/>
+                </a:solidFill>
+                <a:latin typeface="Calibri"/>
+              </a:rPr>
+              <a:t>Conectores: </a:t>
+            </a:r>
+            <a:r>
+              <a:rPr lang="pt-BR" sz="1500" b="0">
+                <a:solidFill>
+                  <a:srgbClr val="FFFFFF"/>
+                </a:solidFill>
+                <a:latin typeface="Calibri"/>
+              </a:rPr>
+              <a:t>Drive, Gmail, Agenda, Canva.</a:t>
+            </a:r>
+          </a:p>
+          <a:p>
+            <a:pPr algn="l" marL="285750" indent="-285750">
+              <a:spcAft>
+                <a:spcPts val="700"/>
+              </a:spcAft>
+              <a:buFont typeface="Arial"/>
+              <a:buChar char="•"/>
+            </a:pPr>
+            <a:r>
+              <a:rPr lang="pt-BR" sz="1500" b="1">
+                <a:solidFill>
+                  <a:srgbClr val="FFFFFF"/>
+                </a:solidFill>
+                <a:latin typeface="Calibri"/>
+              </a:rPr>
+              <a:t>Plugins e skills: </a:t>
+            </a:r>
+            <a:r>
+              <a:rPr lang="pt-BR" sz="1500" b="0">
+                <a:solidFill>
+                  <a:srgbClr val="FFFFFF"/>
+                </a:solidFill>
+                <a:latin typeface="Calibri"/>
+              </a:rPr>
+              <a:t>habilidades prontas, como a BNCC Computação.</a:t>
+            </a:r>
+          </a:p>
+          <a:p>
+            <a:pPr algn="l">
+              <a:spcAft>
+                <a:spcPts val="700"/>
+              </a:spcAft>
+              <a:buNone/>
+            </a:pPr>
+            <a:r>
+              <a:rPr lang="pt-BR" sz="1400" b="0">
+                <a:solidFill>
+                  <a:srgbClr val="C9D6E0"/>
+                </a:solidFill>
+                <a:latin typeface="Calibri"/>
+              </a:rPr>
+              <a:t>Os nomes mudam entre plataformas: procure pela função.</a:t>
+            </a:r>
+          </a:p>
+        </p:txBody>
+      </p:sp>
+      <p:sp>
+        <p:nvSpPr>
+          <p:cNvPr id="9" name="Caixa 9"/>
+          <p:cNvSpPr txBox="1"/>
+          <p:nvPr/>
+        </p:nvSpPr>
+        <p:spPr>
+          <a:xfrm>
+            <a:off x="1920240" y="5943600"/>
+            <a:ext cx="9509760" cy="420000"/>
+          </a:xfrm>
+          <a:prstGeom prst="rect">
+            <a:avLst/>
+          </a:prstGeom>
+          <a:noFill/>
+        </p:spPr>
+        <p:txBody>
+          <a:bodyPr wrap="square" anchor="t" lIns="45720" rIns="45720">
+            <a:normAutofit/>
+          </a:bodyPr>
+          <a:lstStyle/>
+          <a:p>
+            <a:pPr algn="l">
+              <a:spcAft>
+                <a:spcPts val="700"/>
+              </a:spcAft>
+              <a:buNone/>
+            </a:pPr>
+            <a:r>
+              <a:rPr lang="pt-BR" sz="1500" b="0">
+                <a:solidFill>
+                  <a:srgbClr val="C9D6E0"/>
+                </a:solidFill>
+                <a:latin typeface="Calibri"/>
+              </a:rPr>
+              <a:t>Orientações completas: </a:t>
+            </a:r>
+            <a:r>
+              <a:rPr lang="pt-BR" sz="1500" b="1">
+                <a:solidFill>
+                  <a:srgbClr val="29ABE2"/>
+                </a:solidFill>
+                <a:latin typeface="Calibri"/>
+                <a:hlinkClick r:id="rIdGuia"/>
+              </a:rPr>
+              <a:t>Guia de introdução: a tela de uma IA</a:t>
+            </a:r>
+            <a:r>
+              <a:rPr lang="pt-BR" sz="1500" b="0">
+                <a:solidFill>
+                  <a:srgbClr val="C9D6E0"/>
+                </a:solidFill>
+                <a:latin typeface="Calibri"/>
+              </a:rPr>
+              <a:t> (apoio/fundamentos)</a:t>
+            </a:r>
+          </a:p>
+        </p:txBody>
+      </p:sp>
+    </p:spTree>
+  </p:cSld>
+  <p:clrMapOvr>
+    <a:masterClrMapping/>
+  </p:clrMapOvr>
+</p:sld>
+</file>
+
+<file path=ppt/slides/slide26.xml><?xml version="1.0" encoding="utf-8"?>
+<p:sld xmlns:a="http://schemas.openxmlformats.org/drawingml/2006/main" xmlns:p="http://schemas.openxmlformats.org/presentationml/2006/main" xmlns:r="http://schemas.openxmlformats.org/officeDocument/2006/relationships">
+  <p:cSld>
+    <p:spTree>
+      <p:nvGrpSpPr>
+        <p:cNvPr id="1" name=""/>
+        <p:cNvGrpSpPr/>
+        <p:nvPr/>
+      </p:nvGrpSpPr>
+      <p:grpSpPr/>
+      <p:pic>
+        <p:nvPicPr>
+          <p:cNvPr id="2" name="Picture 1" descr="image3.png"/>
+          <p:cNvPicPr>
+            <a:picLocks noChangeAspect="1"/>
+          </p:cNvPicPr>
+          <p:nvPr/>
+        </p:nvPicPr>
+        <p:blipFill>
+          <a:blip r:embed="rId2"/>
+          <a:stretch>
+            <a:fillRect/>
+          </a:stretch>
+        </p:blipFill>
+        <p:spPr>
+          <a:xfrm>
+            <a:off x="0" y="0"/>
+            <a:ext cx="12192000" cy="6858000"/>
+          </a:xfrm>
+          <a:prstGeom prst="rect">
+            <a:avLst/>
+          </a:prstGeom>
+        </p:spPr>
+      </p:pic>
+      <p:sp>
+        <p:nvSpPr>
+          <p:cNvPr id="3" name="TextBox 2"/>
+          <p:cNvSpPr txBox="1"/>
+          <p:nvPr/>
+        </p:nvSpPr>
+        <p:spPr>
+          <a:xfrm>
+            <a:off x="777240" y="411480"/>
+            <a:ext cx="9692640" cy="731520"/>
+          </a:xfrm>
+          <a:prstGeom prst="rect">
+            <a:avLst/>
+          </a:prstGeom>
+          <a:noFill/>
+        </p:spPr>
+        <p:txBody>
+          <a:bodyPr wrap="square" anchor="t" lIns="45720" rIns="45720">
+            <a:spAutoFit/>
+          </a:bodyPr>
+          <a:lstStyle/>
+          <a:p>
+            <a:pPr algn="l">
+              <a:spcAft>
+                <a:spcPts val="600"/>
+              </a:spcAft>
+            </a:pPr>
+            <a:r>
+              <a:rPr sz="3600" b="1">
+                <a:solidFill>
+                  <a:srgbClr val="7ED957"/>
+                </a:solidFill>
+                <a:latin typeface="Calibri"/>
+              </a:rPr>
+              <a:t>Modelo, esforço </a:t>
+            </a:r>
+            <a:r>
+              <a:rPr sz="3600" b="1">
+                <a:solidFill>
+                  <a:srgbClr val="FFFFFF"/>
+                </a:solidFill>
+                <a:latin typeface="Calibri"/>
+              </a:rPr>
+              <a:t>e modo</a:t>
+            </a:r>
+          </a:p>
+        </p:txBody>
+      </p:sp>
+      <p:sp>
+        <p:nvSpPr>
+          <p:cNvPr id="4" name="TextBox 3"/>
+          <p:cNvSpPr txBox="1"/>
+          <p:nvPr/>
+        </p:nvSpPr>
+        <p:spPr>
+          <a:xfrm>
+            <a:off x="777240" y="1097280"/>
+            <a:ext cx="9875520" cy="457200"/>
+          </a:xfrm>
+          <a:prstGeom prst="rect">
+            <a:avLst/>
+          </a:prstGeom>
+          <a:noFill/>
+        </p:spPr>
+        <p:txBody>
+          <a:bodyPr wrap="square" anchor="t" lIns="45720" rIns="45720">
+            <a:spAutoFit/>
+          </a:bodyPr>
+          <a:lstStyle/>
+          <a:p>
+            <a:pPr algn="l">
+              <a:spcAft>
+                <a:spcPts val="600"/>
+              </a:spcAft>
+            </a:pPr>
+            <a:r>
+              <a:rPr sz="2000" b="0">
+                <a:solidFill>
+                  <a:srgbClr val="7ED957"/>
+                </a:solidFill>
+                <a:latin typeface="Calibri"/>
+              </a:rPr>
+              <a:t>Três escolhas antes de enviar o pedido</a:t>
+            </a:r>
+          </a:p>
+        </p:txBody>
+      </p:sp>
+      <p:sp>
+        <p:nvSpPr>
+          <p:cNvPr id="5" name="Rectangle 4"/>
+          <p:cNvSpPr/>
+          <p:nvPr/>
+        </p:nvSpPr>
+        <p:spPr>
+          <a:xfrm>
+            <a:off x="777240" y="1572768"/>
+            <a:ext cx="4206240" cy="25603"/>
+          </a:xfrm>
+          <a:prstGeom prst="rect">
+            <a:avLst/>
+          </a:prstGeom>
+          <a:solidFill>
+            <a:srgbClr val="7ED957"/>
+          </a:solidFill>
+          <a:ln>
+            <a:noFill/>
+          </a:ln>
+        </p:spPr>
+        <p:style>
+          <a:lnRef idx="1">
+            <a:schemeClr val="accent1"/>
+          </a:lnRef>
+          <a:fillRef idx="3">
+            <a:schemeClr val="accent1"/>
+          </a:fillRef>
+          <a:effectRef idx="2">
+            <a:schemeClr val="accent1"/>
+          </a:effectRef>
+          <a:fontRef idx="minor">
+            <a:schemeClr val="lt1"/>
+          </a:fontRef>
+        </p:style>
+        <p:txBody>
+          <a:bodyPr rtlCol="0" anchor="ctr"/>
+          <a:lstStyle/>
+          <a:p>
+            <a:pPr algn="ctr"/>
+          </a:p>
+        </p:txBody>
+      </p:sp>
+      <p:sp>
+        <p:nvSpPr>
+          <p:cNvPr id="6" name="Oval 5"/>
+          <p:cNvSpPr/>
+          <p:nvPr/>
+        </p:nvSpPr>
+        <p:spPr>
+          <a:xfrm>
+            <a:off x="4946903" y="1531620"/>
+            <a:ext cx="128016" cy="128016"/>
+          </a:xfrm>
+          <a:prstGeom prst="ellipse">
+            <a:avLst/>
+          </a:prstGeom>
+          <a:solidFill>
+            <a:srgbClr val="7ED957"/>
+          </a:solidFill>
+          <a:ln>
+            <a:noFill/>
+          </a:ln>
+        </p:spPr>
+        <p:style>
+          <a:lnRef idx="1">
+            <a:schemeClr val="accent1"/>
+          </a:lnRef>
+          <a:fillRef idx="3">
+            <a:schemeClr val="accent1"/>
+          </a:fillRef>
+          <a:effectRef idx="2">
+            <a:schemeClr val="accent1"/>
+          </a:effectRef>
+          <a:fontRef idx="minor">
+            <a:schemeClr val="lt1"/>
+          </a:fontRef>
+        </p:style>
+        <p:txBody>
+          <a:bodyPr rtlCol="0" anchor="ctr"/>
+          <a:lstStyle/>
+          <a:p>
+            <a:pPr algn="ctr"/>
+          </a:p>
+        </p:txBody>
+      </p:sp>
+      <p:sp>
+        <p:nvSpPr>
+          <p:cNvPr id="7" name="Caixa 7"/>
+          <p:cNvSpPr txBox="1"/>
+          <p:nvPr/>
+        </p:nvSpPr>
+        <p:spPr>
+          <a:xfrm>
+            <a:off x="777240" y="1737360"/>
+            <a:ext cx="3337560" cy="3840480"/>
+          </a:xfrm>
+          <a:prstGeom prst="roundRect">
+            <a:avLst/>
+          </a:prstGeom>
+          <a:solidFill>
+            <a:srgbClr val="0F2E45"/>
+          </a:solidFill>
+          <a:ln w="15875">
+            <a:solidFill>
+              <a:srgbClr val="29ABE2"/>
+            </a:solidFill>
+          </a:ln>
+        </p:spPr>
+        <p:txBody>
+          <a:bodyPr wrap="square" anchor="t" lIns="137160" rIns="137160" tIns="109728" bIns="91440">
+            <a:normAutofit/>
+          </a:bodyPr>
+          <a:lstStyle/>
+          <a:p>
+            <a:pPr algn="l">
+              <a:spcAft>
+                <a:spcPts val="300"/>
+              </a:spcAft>
+              <a:buNone/>
+            </a:pPr>
+            <a:r>
+              <a:rPr lang="pt-BR" sz="1300" b="1">
+                <a:solidFill>
+                  <a:srgbClr val="29ABE2"/>
+                </a:solidFill>
+                <a:latin typeface="Calibri"/>
+              </a:rPr>
+              <a:t>QUEM RESPONDE</a:t>
+            </a:r>
+          </a:p>
+          <a:p>
+            <a:pPr algn="l">
+              <a:spcAft>
+                <a:spcPts val="600"/>
+              </a:spcAft>
+              <a:buNone/>
+            </a:pPr>
+            <a:r>
+              <a:rPr lang="pt-BR" sz="2200" b="1">
+                <a:solidFill>
+                  <a:srgbClr val="7ED957"/>
+                </a:solidFill>
+                <a:latin typeface="Calibri"/>
+              </a:rPr>
+              <a:t>Modelo</a:t>
+            </a:r>
+          </a:p>
+          <a:p>
+            <a:pPr algn="l">
+              <a:spcAft>
+                <a:spcPts val="500"/>
+              </a:spcAft>
+              <a:buNone/>
+            </a:pPr>
+            <a:r>
+              <a:rPr lang="pt-BR" sz="1500" b="1">
+                <a:solidFill>
+                  <a:srgbClr val="FFFFFF"/>
+                </a:solidFill>
+                <a:latin typeface="Calibri"/>
+              </a:rPr>
+              <a:t>Rápido: </a:t>
+            </a:r>
+            <a:r>
+              <a:rPr lang="pt-BR" sz="1500" b="0">
+                <a:solidFill>
+                  <a:srgbClr val="C9D6E0"/>
+                </a:solidFill>
+                <a:latin typeface="Calibri"/>
+              </a:rPr>
+              <a:t>legendas e ajustes.</a:t>
+            </a:r>
+          </a:p>
+          <a:p>
+            <a:pPr algn="l">
+              <a:spcAft>
+                <a:spcPts val="500"/>
+              </a:spcAft>
+              <a:buNone/>
+            </a:pPr>
+            <a:r>
+              <a:rPr lang="pt-BR" sz="1500" b="1">
+                <a:solidFill>
+                  <a:srgbClr val="FFFFFF"/>
+                </a:solidFill>
+                <a:latin typeface="Calibri"/>
+              </a:rPr>
+              <a:t>Equilibrado: </a:t>
+            </a:r>
+            <a:r>
+              <a:rPr lang="pt-BR" sz="1500" b="0">
+                <a:solidFill>
+                  <a:srgbClr val="C9D6E0"/>
+                </a:solidFill>
+                <a:latin typeface="Calibri"/>
+              </a:rPr>
+              <a:t>comunicados e roteiros.</a:t>
+            </a:r>
+          </a:p>
+          <a:p>
+            <a:pPr algn="l">
+              <a:spcAft>
+                <a:spcPts val="500"/>
+              </a:spcAft>
+              <a:buNone/>
+            </a:pPr>
+            <a:r>
+              <a:rPr lang="pt-BR" sz="1500" b="1">
+                <a:solidFill>
+                  <a:srgbClr val="FFFFFF"/>
+                </a:solidFill>
+                <a:latin typeface="Calibri"/>
+              </a:rPr>
+              <a:t>Mais capaz: </a:t>
+            </a:r>
+            <a:r>
+              <a:rPr lang="pt-BR" sz="1500" b="0">
+                <a:solidFill>
+                  <a:srgbClr val="C9D6E0"/>
+                </a:solidFill>
+                <a:latin typeface="Calibri"/>
+              </a:rPr>
+              <a:t>planilhas, revisões, relatórios.</a:t>
+            </a:r>
+          </a:p>
+        </p:txBody>
+      </p:sp>
+      <p:sp>
+        <p:nvSpPr>
+          <p:cNvPr id="8" name="Caixa 8"/>
+          <p:cNvSpPr txBox="1"/>
+          <p:nvPr/>
+        </p:nvSpPr>
+        <p:spPr>
+          <a:xfrm>
+            <a:off x="4343400" y="1737360"/>
+            <a:ext cx="3337560" cy="3840480"/>
+          </a:xfrm>
+          <a:prstGeom prst="roundRect">
+            <a:avLst/>
+          </a:prstGeom>
+          <a:solidFill>
+            <a:srgbClr val="0F2E45"/>
+          </a:solidFill>
+          <a:ln w="15875">
+            <a:solidFill>
+              <a:srgbClr val="29ABE2"/>
+            </a:solidFill>
+          </a:ln>
+        </p:spPr>
+        <p:txBody>
+          <a:bodyPr wrap="square" anchor="t" lIns="137160" rIns="137160" tIns="109728" bIns="91440">
+            <a:normAutofit/>
+          </a:bodyPr>
+          <a:lstStyle/>
+          <a:p>
+            <a:pPr algn="l">
+              <a:spcAft>
+                <a:spcPts val="300"/>
+              </a:spcAft>
+              <a:buNone/>
+            </a:pPr>
+            <a:r>
+              <a:rPr lang="pt-BR" sz="1300" b="1">
+                <a:solidFill>
+                  <a:srgbClr val="29ABE2"/>
+                </a:solidFill>
+                <a:latin typeface="Calibri"/>
+              </a:rPr>
+              <a:t>QUANTO PENSA</a:t>
+            </a:r>
+          </a:p>
+          <a:p>
+            <a:pPr algn="l">
+              <a:spcAft>
+                <a:spcPts val="600"/>
+              </a:spcAft>
+              <a:buNone/>
+            </a:pPr>
+            <a:r>
+              <a:rPr lang="pt-BR" sz="2200" b="1">
+                <a:solidFill>
+                  <a:srgbClr val="7ED957"/>
+                </a:solidFill>
+                <a:latin typeface="Calibri"/>
+              </a:rPr>
+              <a:t>Esforço</a:t>
+            </a:r>
+          </a:p>
+          <a:p>
+            <a:pPr algn="l">
+              <a:spcAft>
+                <a:spcPts val="500"/>
+              </a:spcAft>
+              <a:buNone/>
+            </a:pPr>
+            <a:r>
+              <a:rPr lang="pt-BR" sz="1500" b="1">
+                <a:solidFill>
+                  <a:srgbClr val="FFFFFF"/>
+                </a:solidFill>
+                <a:latin typeface="Calibri"/>
+              </a:rPr>
+              <a:t>Baixo: </a:t>
+            </a:r>
+            <a:r>
+              <a:rPr lang="pt-BR" sz="1500" b="0">
+                <a:solidFill>
+                  <a:srgbClr val="C9D6E0"/>
+                </a:solidFill>
+                <a:latin typeface="Calibri"/>
+              </a:rPr>
+              <a:t>“deixe o card 3 mais curto”.</a:t>
+            </a:r>
+          </a:p>
+          <a:p>
+            <a:pPr algn="l">
+              <a:spcAft>
+                <a:spcPts val="500"/>
+              </a:spcAft>
+              <a:buNone/>
+            </a:pPr>
+            <a:r>
+              <a:rPr lang="pt-BR" sz="1500" b="1">
+                <a:solidFill>
+                  <a:srgbClr val="FFFFFF"/>
+                </a:solidFill>
+                <a:latin typeface="Calibri"/>
+              </a:rPr>
+              <a:t>Médio: </a:t>
+            </a:r>
+            <a:r>
+              <a:rPr lang="pt-BR" sz="1500" b="0">
+                <a:solidFill>
+                  <a:srgbClr val="C9D6E0"/>
+                </a:solidFill>
+                <a:latin typeface="Calibri"/>
+              </a:rPr>
+              <a:t>a maioria dos textos.</a:t>
+            </a:r>
+          </a:p>
+          <a:p>
+            <a:pPr algn="l">
+              <a:spcAft>
+                <a:spcPts val="500"/>
+              </a:spcAft>
+              <a:buNone/>
+            </a:pPr>
+            <a:r>
+              <a:rPr lang="pt-BR" sz="1500" b="1">
+                <a:solidFill>
+                  <a:srgbClr val="FFFFFF"/>
+                </a:solidFill>
+                <a:latin typeface="Calibri"/>
+              </a:rPr>
+              <a:t>Alto: </a:t>
+            </a:r>
+            <a:r>
+              <a:rPr lang="pt-BR" sz="1500" b="0">
+                <a:solidFill>
+                  <a:srgbClr val="C9D6E0"/>
+                </a:solidFill>
+                <a:latin typeface="Calibri"/>
+              </a:rPr>
+              <a:t>números, leis, checklists. Demora mais e gasta mais do limite.</a:t>
+            </a:r>
+          </a:p>
+        </p:txBody>
+      </p:sp>
+      <p:sp>
+        <p:nvSpPr>
+          <p:cNvPr id="9" name="Caixa 9"/>
+          <p:cNvSpPr txBox="1"/>
+          <p:nvPr/>
+        </p:nvSpPr>
+        <p:spPr>
+          <a:xfrm>
+            <a:off x="7909560" y="1737360"/>
+            <a:ext cx="3337560" cy="3840480"/>
+          </a:xfrm>
+          <a:prstGeom prst="roundRect">
+            <a:avLst/>
+          </a:prstGeom>
+          <a:solidFill>
+            <a:srgbClr val="0F2E45"/>
+          </a:solidFill>
+          <a:ln w="15875">
+            <a:solidFill>
+              <a:srgbClr val="29ABE2"/>
+            </a:solidFill>
+          </a:ln>
+        </p:spPr>
+        <p:txBody>
+          <a:bodyPr wrap="square" anchor="t" lIns="137160" rIns="137160" tIns="109728" bIns="91440">
+            <a:normAutofit/>
+          </a:bodyPr>
+          <a:lstStyle/>
+          <a:p>
+            <a:pPr algn="l">
+              <a:spcAft>
+                <a:spcPts val="300"/>
+              </a:spcAft>
+              <a:buNone/>
+            </a:pPr>
+            <a:r>
+              <a:rPr lang="pt-BR" sz="1300" b="1">
+                <a:solidFill>
+                  <a:srgbClr val="29ABE2"/>
+                </a:solidFill>
+                <a:latin typeface="Calibri"/>
+              </a:rPr>
+              <a:t>QUEM DECIDE</a:t>
+            </a:r>
+          </a:p>
+          <a:p>
+            <a:pPr algn="l">
+              <a:spcAft>
+                <a:spcPts val="600"/>
+              </a:spcAft>
+              <a:buNone/>
+            </a:pPr>
+            <a:r>
+              <a:rPr lang="pt-BR" sz="2200" b="1">
+                <a:solidFill>
+                  <a:srgbClr val="7ED957"/>
+                </a:solidFill>
+                <a:latin typeface="Calibri"/>
+              </a:rPr>
+              <a:t>Modo</a:t>
+            </a:r>
+          </a:p>
+          <a:p>
+            <a:pPr algn="l">
+              <a:spcAft>
+                <a:spcPts val="500"/>
+              </a:spcAft>
+              <a:buNone/>
+            </a:pPr>
+            <a:r>
+              <a:rPr lang="pt-BR" sz="1500" b="1">
+                <a:solidFill>
+                  <a:srgbClr val="FFFFFF"/>
+                </a:solidFill>
+                <a:latin typeface="Calibri"/>
+              </a:rPr>
+              <a:t>Automático: </a:t>
+            </a:r>
+            <a:r>
+              <a:rPr lang="pt-BR" sz="1500" b="0">
+                <a:solidFill>
+                  <a:srgbClr val="C9D6E0"/>
+                </a:solidFill>
+                <a:latin typeface="Calibri"/>
+              </a:rPr>
+              <a:t>a plataforma escolhe o modelo ou o agente age sozinho.</a:t>
+            </a:r>
+          </a:p>
+          <a:p>
+            <a:pPr algn="l">
+              <a:spcAft>
+                <a:spcPts val="500"/>
+              </a:spcAft>
+              <a:buNone/>
+            </a:pPr>
+            <a:r>
+              <a:rPr lang="pt-BR" sz="1500" b="1">
+                <a:solidFill>
+                  <a:srgbClr val="FFFFFF"/>
+                </a:solidFill>
+                <a:latin typeface="Calibri"/>
+              </a:rPr>
+              <a:t>Com aprovação: </a:t>
+            </a:r>
+            <a:r>
+              <a:rPr lang="pt-BR" sz="1500" b="0">
+                <a:solidFill>
+                  <a:srgbClr val="C9D6E0"/>
+                </a:solidFill>
+                <a:latin typeface="Calibri"/>
+              </a:rPr>
+              <a:t>você confirma cada ação. Na escola, sempre este.</a:t>
+            </a:r>
+          </a:p>
+        </p:txBody>
+      </p:sp>
+      <p:sp>
+        <p:nvSpPr>
+          <p:cNvPr id="10" name="Caixa 10"/>
+          <p:cNvSpPr txBox="1"/>
+          <p:nvPr/>
+        </p:nvSpPr>
+        <p:spPr>
+          <a:xfrm>
+            <a:off x="1920240" y="5943600"/>
+            <a:ext cx="9509760" cy="420000"/>
+          </a:xfrm>
+          <a:prstGeom prst="rect">
+            <a:avLst/>
+          </a:prstGeom>
+          <a:noFill/>
+        </p:spPr>
+        <p:txBody>
+          <a:bodyPr wrap="square" anchor="t" lIns="45720" rIns="45720">
+            <a:normAutofit/>
+          </a:bodyPr>
+          <a:lstStyle/>
+          <a:p>
+            <a:pPr algn="l">
+              <a:spcAft>
+                <a:spcPts val="700"/>
+              </a:spcAft>
+              <a:buNone/>
+            </a:pPr>
+            <a:r>
+              <a:rPr lang="pt-BR" sz="1500" b="0">
+                <a:solidFill>
+                  <a:srgbClr val="C9D6E0"/>
+                </a:solidFill>
+                <a:latin typeface="Calibri"/>
+              </a:rPr>
+              <a:t>Orientações completas: </a:t>
+            </a:r>
+            <a:r>
+              <a:rPr lang="pt-BR" sz="1500" b="1">
+                <a:solidFill>
+                  <a:srgbClr val="29ABE2"/>
+                </a:solidFill>
+                <a:latin typeface="Calibri"/>
+                <a:hlinkClick r:id="rIdGuia"/>
+              </a:rPr>
+              <a:t>Guia de introdução: a tela de uma IA</a:t>
+            </a:r>
+            <a:r>
+              <a:rPr lang="pt-BR" sz="1500" b="0">
+                <a:solidFill>
+                  <a:srgbClr val="C9D6E0"/>
+                </a:solidFill>
+                <a:latin typeface="Calibri"/>
+              </a:rPr>
+              <a:t> (apoio/fundamentos)</a:t>
+            </a:r>
+          </a:p>
+        </p:txBody>
+      </p:sp>
+    </p:spTree>
+  </p:cSld>
+  <p:clrMapOvr>
+    <a:masterClrMapping/>
+  </p:clrMapOvr>
+</p:sld>
+</file>
+
+<file path=ppt/slides/slide27.xml><?xml version="1.0" encoding="utf-8"?>
+<p:sld xmlns:a="http://schemas.openxmlformats.org/drawingml/2006/main" xmlns:p="http://schemas.openxmlformats.org/presentationml/2006/main" xmlns:r="http://schemas.openxmlformats.org/officeDocument/2006/relationships">
+  <p:cSld>
+    <p:spTree>
+      <p:nvGrpSpPr>
+        <p:cNvPr id="1" name=""/>
+        <p:cNvGrpSpPr/>
+        <p:nvPr/>
+      </p:nvGrpSpPr>
+      <p:grpSpPr/>
+      <p:pic>
+        <p:nvPicPr>
+          <p:cNvPr id="2" name="Picture 1" descr="image3.png"/>
+          <p:cNvPicPr>
+            <a:picLocks noChangeAspect="1"/>
+          </p:cNvPicPr>
+          <p:nvPr/>
+        </p:nvPicPr>
+        <p:blipFill>
+          <a:blip r:embed="rId2"/>
+          <a:stretch>
+            <a:fillRect/>
+          </a:stretch>
+        </p:blipFill>
+        <p:spPr>
+          <a:xfrm>
+            <a:off x="0" y="0"/>
+            <a:ext cx="12192000" cy="6858000"/>
+          </a:xfrm>
+          <a:prstGeom prst="rect">
+            <a:avLst/>
+          </a:prstGeom>
+        </p:spPr>
+      </p:pic>
+      <p:sp>
+        <p:nvSpPr>
+          <p:cNvPr id="3" name="TextBox 2"/>
+          <p:cNvSpPr txBox="1"/>
+          <p:nvPr/>
+        </p:nvSpPr>
+        <p:spPr>
+          <a:xfrm>
+            <a:off x="777240" y="411480"/>
+            <a:ext cx="9692640" cy="731520"/>
+          </a:xfrm>
+          <a:prstGeom prst="rect">
+            <a:avLst/>
+          </a:prstGeom>
+          <a:noFill/>
+        </p:spPr>
+        <p:txBody>
+          <a:bodyPr wrap="square" anchor="t" lIns="45720" rIns="45720">
+            <a:spAutoFit/>
+          </a:bodyPr>
+          <a:lstStyle/>
+          <a:p>
+            <a:pPr algn="l">
+              <a:spcAft>
+                <a:spcPts val="600"/>
+              </a:spcAft>
+            </a:pPr>
+            <a:r>
+              <a:rPr sz="3600" b="1">
+                <a:solidFill>
+                  <a:srgbClr val="7ED957"/>
+                </a:solidFill>
+                <a:latin typeface="Calibri"/>
+              </a:rPr>
+              <a:t>Extensões: </a:t>
+            </a:r>
+            <a:r>
+              <a:rPr sz="3600" b="1">
+                <a:solidFill>
+                  <a:srgbClr val="FFFFFF"/>
+                </a:solidFill>
+                <a:latin typeface="Calibri"/>
+              </a:rPr>
+              <a:t>a IA que age nos sites</a:t>
+            </a:r>
+          </a:p>
+        </p:txBody>
+      </p:sp>
+      <p:sp>
+        <p:nvSpPr>
+          <p:cNvPr id="4" name="TextBox 3"/>
+          <p:cNvSpPr txBox="1"/>
+          <p:nvPr/>
+        </p:nvSpPr>
+        <p:spPr>
+          <a:xfrm>
+            <a:off x="777240" y="1097280"/>
+            <a:ext cx="9875520" cy="457200"/>
+          </a:xfrm>
+          <a:prstGeom prst="rect">
+            <a:avLst/>
+          </a:prstGeom>
+          <a:noFill/>
+        </p:spPr>
+        <p:txBody>
+          <a:bodyPr wrap="square" anchor="t" lIns="45720" rIns="45720">
+            <a:spAutoFit/>
+          </a:bodyPr>
+          <a:lstStyle/>
+          <a:p>
+            <a:pPr algn="l">
+              <a:spcAft>
+                <a:spcPts val="600"/>
+              </a:spcAft>
+            </a:pPr>
+            <a:r>
+              <a:rPr sz="2000" b="0">
+                <a:solidFill>
+                  <a:srgbClr val="7ED957"/>
+                </a:solidFill>
+                <a:latin typeface="Calibri"/>
+              </a:rPr>
+              <a:t>Lê a aba aberta, clica e preenche, com a sua aprovação</a:t>
+            </a:r>
+          </a:p>
+        </p:txBody>
+      </p:sp>
+      <p:sp>
+        <p:nvSpPr>
+          <p:cNvPr id="5" name="Rectangle 4"/>
+          <p:cNvSpPr/>
+          <p:nvPr/>
+        </p:nvSpPr>
+        <p:spPr>
+          <a:xfrm>
+            <a:off x="777240" y="1572768"/>
+            <a:ext cx="4206240" cy="25603"/>
+          </a:xfrm>
+          <a:prstGeom prst="rect">
+            <a:avLst/>
+          </a:prstGeom>
+          <a:solidFill>
+            <a:srgbClr val="7ED957"/>
+          </a:solidFill>
+          <a:ln>
+            <a:noFill/>
+          </a:ln>
+        </p:spPr>
+        <p:style>
+          <a:lnRef idx="1">
+            <a:schemeClr val="accent1"/>
+          </a:lnRef>
+          <a:fillRef idx="3">
+            <a:schemeClr val="accent1"/>
+          </a:fillRef>
+          <a:effectRef idx="2">
+            <a:schemeClr val="accent1"/>
+          </a:effectRef>
+          <a:fontRef idx="minor">
+            <a:schemeClr val="lt1"/>
+          </a:fontRef>
+        </p:style>
+        <p:txBody>
+          <a:bodyPr rtlCol="0" anchor="ctr"/>
+          <a:lstStyle/>
+          <a:p>
+            <a:pPr algn="ctr"/>
+          </a:p>
+        </p:txBody>
+      </p:sp>
+      <p:sp>
+        <p:nvSpPr>
+          <p:cNvPr id="6" name="Oval 5"/>
+          <p:cNvSpPr/>
+          <p:nvPr/>
+        </p:nvSpPr>
+        <p:spPr>
+          <a:xfrm>
+            <a:off x="4946903" y="1531620"/>
+            <a:ext cx="128016" cy="128016"/>
+          </a:xfrm>
+          <a:prstGeom prst="ellipse">
+            <a:avLst/>
+          </a:prstGeom>
+          <a:solidFill>
+            <a:srgbClr val="7ED957"/>
+          </a:solidFill>
+          <a:ln>
+            <a:noFill/>
+          </a:ln>
+        </p:spPr>
+        <p:style>
+          <a:lnRef idx="1">
+            <a:schemeClr val="accent1"/>
+          </a:lnRef>
+          <a:fillRef idx="3">
+            <a:schemeClr val="accent1"/>
+          </a:fillRef>
+          <a:effectRef idx="2">
+            <a:schemeClr val="accent1"/>
+          </a:effectRef>
+          <a:fontRef idx="minor">
+            <a:schemeClr val="lt1"/>
+          </a:fontRef>
+        </p:style>
+        <p:txBody>
+          <a:bodyPr rtlCol="0" anchor="ctr"/>
+          <a:lstStyle/>
+          <a:p>
+            <a:pPr algn="ctr"/>
+          </a:p>
+        </p:txBody>
+      </p:sp>
+      <p:pic>
+        <p:nvPicPr>
+          <p:cNvPr id="7" name="Infográfico: extensões de navegador, fluxo e cuidados" descr="Infográfico: extensões de navegador, fluxo e cuidados">
+            <a:hlinkClick r:id="rIdGuia"/>
+          </p:cNvPr>
+          <p:cNvPicPr>
+            <a:picLocks noChangeAspect="1"/>
+          </p:cNvPicPr>
+          <p:nvPr/>
+        </p:nvPicPr>
+        <p:blipFill>
+          <a:blip r:embed="rIdInfo"/>
+          <a:stretch>
+            <a:fillRect/>
+          </a:stretch>
+        </p:blipFill>
+        <p:spPr>
+          <a:xfrm>
+            <a:off x="777240" y="1737360"/>
+            <a:ext cx="5878285" cy="3840480"/>
+          </a:xfrm>
+          <a:prstGeom prst="rect">
+            <a:avLst/>
+          </a:prstGeom>
+        </p:spPr>
+      </p:pic>
+      <p:sp>
+        <p:nvSpPr>
+          <p:cNvPr id="8" name="Caixa 8"/>
+          <p:cNvSpPr txBox="1"/>
+          <p:nvPr/>
+        </p:nvSpPr>
+        <p:spPr>
+          <a:xfrm>
+            <a:off x="6884125" y="1737360"/>
+            <a:ext cx="4530635" cy="3840480"/>
+          </a:xfrm>
+          <a:prstGeom prst="rect">
+            <a:avLst/>
+          </a:prstGeom>
+          <a:noFill/>
+        </p:spPr>
+        <p:txBody>
+          <a:bodyPr wrap="square" anchor="t" lIns="45720" rIns="45720">
+            <a:normAutofit/>
+          </a:bodyPr>
+          <a:lstStyle/>
+          <a:p>
+            <a:pPr algn="l">
+              <a:spcAft>
+                <a:spcPts val="700"/>
+              </a:spcAft>
+              <a:buNone/>
+            </a:pPr>
+            <a:r>
+              <a:rPr lang="pt-BR" sz="1800" b="1">
+                <a:solidFill>
+                  <a:srgbClr val="7ED957"/>
+                </a:solidFill>
+                <a:latin typeface="Calibri"/>
+              </a:rPr>
+              <a:t>Regra de ouro</a:t>
+            </a:r>
+          </a:p>
+          <a:p>
+            <a:pPr algn="l" marL="285750" indent="-285750">
+              <a:spcAft>
+                <a:spcPts val="700"/>
+              </a:spcAft>
+              <a:buFont typeface="Arial"/>
+              <a:buChar char="•"/>
+            </a:pPr>
+            <a:r>
+              <a:rPr lang="pt-BR" sz="1500" b="1">
+                <a:solidFill>
+                  <a:srgbClr val="FFFFFF"/>
+                </a:solidFill>
+                <a:latin typeface="Calibri"/>
+              </a:rPr>
+              <a:t>Perfil de navegador separado, </a:t>
+            </a:r>
+            <a:r>
+              <a:rPr lang="pt-BR" sz="1500" b="0">
+                <a:solidFill>
+                  <a:srgbClr val="FFFFFF"/>
+                </a:solidFill>
+                <a:latin typeface="Calibri"/>
+              </a:rPr>
+              <a:t>sem sistemas da escola abertos.</a:t>
+            </a:r>
+          </a:p>
+          <a:p>
+            <a:pPr algn="l" marL="285750" indent="-285750">
+              <a:spcAft>
+                <a:spcPts val="700"/>
+              </a:spcAft>
+              <a:buFont typeface="Arial"/>
+              <a:buChar char="•"/>
+            </a:pPr>
+            <a:r>
+              <a:rPr lang="pt-BR" sz="1500" b="1">
+                <a:solidFill>
+                  <a:srgbClr val="FFFFFF"/>
+                </a:solidFill>
+                <a:latin typeface="Calibri"/>
+              </a:rPr>
+              <a:t>Só os sites necessários </a:t>
+            </a:r>
+            <a:r>
+              <a:rPr lang="pt-BR" sz="1500" b="0">
+                <a:solidFill>
+                  <a:srgbClr val="FFFFFF"/>
+                </a:solidFill>
+                <a:latin typeface="Calibri"/>
+              </a:rPr>
+              <a:t>e aprovação manual.</a:t>
+            </a:r>
+          </a:p>
+          <a:p>
+            <a:pPr algn="l" marL="285750" indent="-285750">
+              <a:spcAft>
+                <a:spcPts val="700"/>
+              </a:spcAft>
+              <a:buFont typeface="Arial"/>
+              <a:buChar char="•"/>
+            </a:pPr>
+            <a:r>
+              <a:rPr lang="pt-BR" sz="1500" b="1">
+                <a:solidFill>
+                  <a:srgbClr val="FFFFFF"/>
+                </a:solidFill>
+                <a:latin typeface="Calibri"/>
+              </a:rPr>
+              <a:t>Comece pelo reversível: </a:t>
+            </a:r>
+            <a:r>
+              <a:rPr lang="pt-BR" sz="1500" b="0">
+                <a:solidFill>
+                  <a:srgbClr val="FFFFFF"/>
+                </a:solidFill>
+                <a:latin typeface="Calibri"/>
+              </a:rPr>
+              <a:t>rascunhos, eventos, formulários não publicados.</a:t>
+            </a:r>
+          </a:p>
+        </p:txBody>
+      </p:sp>
+      <p:sp>
+        <p:nvSpPr>
+          <p:cNvPr id="9" name="Caixa 9"/>
+          <p:cNvSpPr txBox="1"/>
+          <p:nvPr/>
+        </p:nvSpPr>
+        <p:spPr>
+          <a:xfrm>
+            <a:off x="1920240" y="5943600"/>
+            <a:ext cx="9509760" cy="420000"/>
+          </a:xfrm>
+          <a:prstGeom prst="rect">
+            <a:avLst/>
+          </a:prstGeom>
+          <a:noFill/>
+        </p:spPr>
+        <p:txBody>
+          <a:bodyPr wrap="square" anchor="t" lIns="45720" rIns="45720">
+            <a:normAutofit/>
+          </a:bodyPr>
+          <a:lstStyle/>
+          <a:p>
+            <a:pPr algn="l">
+              <a:spcAft>
+                <a:spcPts val="700"/>
+              </a:spcAft>
+              <a:buNone/>
+            </a:pPr>
+            <a:r>
+              <a:rPr lang="pt-BR" sz="1500" b="0">
+                <a:solidFill>
+                  <a:srgbClr val="C9D6E0"/>
+                </a:solidFill>
+                <a:latin typeface="Calibri"/>
+              </a:rPr>
+              <a:t>Orientações completas: </a:t>
+            </a:r>
+            <a:r>
+              <a:rPr lang="pt-BR" sz="1500" b="1">
+                <a:solidFill>
+                  <a:srgbClr val="29ABE2"/>
+                </a:solidFill>
+                <a:latin typeface="Calibri"/>
+                <a:hlinkClick r:id="rIdGuia"/>
+              </a:rPr>
+              <a:t>Guia de introdução: a tela de uma IA</a:t>
+            </a:r>
+            <a:r>
+              <a:rPr lang="pt-BR" sz="1500" b="0">
+                <a:solidFill>
+                  <a:srgbClr val="C9D6E0"/>
+                </a:solidFill>
+                <a:latin typeface="Calibri"/>
+              </a:rPr>
+              <a:t> (apoio/fundamentos)</a:t>
             </a:r>
           </a:p>
         </p:txBody>
